--- a/09_rnn_lstm/excel_rnn_lstm_slides.pptx
+++ b/09_rnn_lstm/excel_rnn_lstm_slides.pptx
@@ -3278,16 +3278,8 @@
           </a:bodyPr>
           <a:lstStyle/>
           <a:p>
-            <a:pPr algn="l">
-              <a:defRPr sz="1500" b="1">
-                <a:solidFill>
-                  <a:srgbClr val="475569"/>
-                </a:solidFill>
-                <a:latin typeface="Yu Gothic"/>
-              </a:defRPr>
-            </a:pPr>
-            <a:r>
-              <a:t>時系列入力とhidden state、ゲートを追う</a:t>
+            <a:r>
+              <a:t>LSTMの3ゲートで状態更新を追う</a:t>
             </a:r>
           </a:p>
         </p:txBody>
@@ -4905,24 +4897,16 @@
           <a:bodyPr rtlCol="0" anchor="ctr" wrap="square" bIns="36576"/>
           <a:lstStyle/>
           <a:p>
-            <a:pPr algn="ctr">
-              <a:defRPr sz="1700" b="1">
-                <a:solidFill>
-                  <a:srgbClr val="276749"/>
-                </a:solidFill>
-                <a:latin typeface="Yu Gothic"/>
-              </a:defRPr>
-            </a:pPr>
-            <a:r>
-              <a:t>まずは</a:t>
+            <a:r>
+              <a:t>gateとstateを</a:t>
             </a:r>
             <a:br/>
             <a:r>
-              <a:t>基本の表</a:t>
+              <a:t>切り替えて</a:t>
             </a:r>
             <a:br/>
             <a:r>
-              <a:t>から読む</a:t>
+              <a:t>流れを読む</a:t>
             </a:r>
           </a:p>
         </p:txBody>
@@ -5378,20 +5362,12 @@
           <a:bodyPr rtlCol="0" anchor="ctr" wrap="square" bIns="36576"/>
           <a:lstStyle/>
           <a:p>
-            <a:pPr algn="ctr">
-              <a:defRPr sz="1700" b="1">
-                <a:solidFill>
-                  <a:srgbClr val="2F6690"/>
-                </a:solidFill>
-                <a:latin typeface="Yu Gothic"/>
-              </a:defRPr>
-            </a:pPr>
-            <a:r>
-              <a:t>列名を</a:t>
+            <a:r>
+              <a:t>forget/input/outputと</a:t>
             </a:r>
             <a:br/>
             <a:r>
-              <a:t>計算の役割に</a:t>
+              <a:t>cell/hiddenを</a:t>
             </a:r>
             <a:br/>
             <a:r>
@@ -5851,24 +5827,16 @@
           <a:bodyPr rtlCol="0" anchor="ctr" wrap="square" bIns="36576"/>
           <a:lstStyle/>
           <a:p>
-            <a:pPr algn="ctr">
-              <a:defRPr sz="1700" b="1">
-                <a:solidFill>
-                  <a:srgbClr val="276749"/>
-                </a:solidFill>
-                <a:latin typeface="Yu Gothic"/>
-              </a:defRPr>
-            </a:pPr>
-            <a:r>
-              <a:t>設定を変えたら</a:t>
+            <a:r>
+              <a:t>output_gateを</a:t>
             </a:r>
             <a:br/>
             <a:r>
-              <a:t>どの列が動くかを</a:t>
+              <a:t>変えたら</a:t>
             </a:r>
             <a:br/>
             <a:r>
-              <a:t>見る</a:t>
+              <a:t>hidden_stateを見る</a:t>
             </a:r>
           </a:p>
         </p:txBody>
@@ -6463,16 +6431,8 @@
           <a:bodyPr rtlCol="0" anchor="ctr" wrap="square" bIns="36576"/>
           <a:lstStyle/>
           <a:p>
-            <a:pPr algn="ctr">
-              <a:defRPr sz="1400" b="1">
-                <a:solidFill>
-                  <a:srgbClr val="24324B"/>
-                </a:solidFill>
-                <a:latin typeface="Yu Gothic"/>
-              </a:defRPr>
-            </a:pPr>
-            <a:r>
-              <a:t>RNN/LSTMは時間方向の状態を更新する</a:t>
+            <a:r>
+              <a:t>LSTMは時間方向にcell stateとhidden stateを更新する</a:t>
             </a:r>
           </a:p>
         </p:txBody>
@@ -6968,16 +6928,8 @@
           <a:bodyPr rtlCol="0" anchor="ctr" wrap="square" bIns="36576"/>
           <a:lstStyle/>
           <a:p>
-            <a:pPr algn="ctr">
-              <a:defRPr sz="1600" b="1">
-                <a:solidFill>
-                  <a:srgbClr val="24324B"/>
-                </a:solidFill>
-                <a:latin typeface="Yu Gothic"/>
-              </a:defRPr>
-            </a:pPr>
-            <a:r>
-              <a:t>小さくしているのは、式と表の対応を見失わないためです。</a:t>
+            <a:r>
+              <a:t>この回では1次元の状態だけで、LSTMの3ゲートの役割に絞ります。</a:t>
             </a:r>
           </a:p>
         </p:txBody>
@@ -7315,16 +7267,8 @@
           </a:bodyPr>
           <a:lstStyle/>
           <a:p>
-            <a:pPr algn="ctr">
-              <a:defRPr sz="1800" b="1">
-                <a:solidFill>
-                  <a:srgbClr val="24324B"/>
-                </a:solidFill>
-                <a:latin typeface="Yu Gothic"/>
-              </a:defRPr>
-            </a:pPr>
-            <a:r>
-              <a:t>時系列入力とhidden state、ゲートを追う</a:t>
+            <a:r>
+              <a:t>LSTMの3ゲートで状態更新を追う</a:t>
             </a:r>
           </a:p>
         </p:txBody>
@@ -7449,16 +7393,33 @@
           </a:bodyPr>
           <a:lstStyle/>
           <a:p>
-            <a:pPr algn="l">
-              <a:defRPr sz="2500" b="1">
-                <a:solidFill>
-                  <a:srgbClr val="24324B"/>
-                </a:solidFill>
-                <a:latin typeface="Yu Gothic"/>
-              </a:defRPr>
-            </a:pPr>
             <a:r>
               <a:t>この回の用語</a:t>
+            </a:r>
+          </a:p>
+          <a:p>
+            <a:r>
+              <a:t>cell state: 長めに保持する内部状態</a:t>
+            </a:r>
+          </a:p>
+          <a:p>
+            <a:r>
+              <a:t>hidden state: 次の時刻や出力へ渡す状態</a:t>
+            </a:r>
+          </a:p>
+          <a:p>
+            <a:r>
+              <a:t>forget gate: 前のcellを残す割合</a:t>
+            </a:r>
+          </a:p>
+          <a:p>
+            <a:r>
+              <a:t>input gate: 新しい候補を入れる割合</a:t>
+            </a:r>
+          </a:p>
+          <a:p>
+            <a:r>
+              <a:t>output gate: cellをhiddenとして出す割合</a:t>
             </a:r>
           </a:p>
         </p:txBody>
@@ -8554,16 +8515,8 @@
           <a:bodyPr rtlCol="0" anchor="ctr" wrap="square" bIns="36576"/>
           <a:lstStyle/>
           <a:p>
-            <a:pPr algn="ctr">
-              <a:defRPr sz="1400" b="1">
-                <a:solidFill>
-                  <a:srgbClr val="24324B"/>
-                </a:solidFill>
-                <a:latin typeface="Yu Gothic"/>
-              </a:defRPr>
-            </a:pPr>
-            <a:r>
-              <a:t>過去の情報を残すか忘れるかを表で追う</a:t>
+            <a:r>
+              <a:t>残す・入れる・出すを表で追う</a:t>
             </a:r>
           </a:p>
         </p:txBody>
@@ -8688,16 +8641,8 @@
           </a:bodyPr>
           <a:lstStyle/>
           <a:p>
-            <a:pPr algn="l">
-              <a:defRPr sz="2500" b="1">
-                <a:solidFill>
-                  <a:srgbClr val="24324B"/>
-                </a:solidFill>
-                <a:latin typeface="Yu Gothic"/>
-              </a:defRPr>
-            </a:pPr>
-            <a:r>
-              <a:t>時系列入力とhidden state、ゲートを追う</a:t>
+            <a:r>
+              <a:t>LSTMの3ゲートで状態更新を追う</a:t>
             </a:r>
           </a:p>
         </p:txBody>
@@ -8724,65 +8669,21 @@
           </a:bodyPr>
           <a:lstStyle/>
           <a:p>
-            <a:pPr>
-              <a:spcAft>
-                <a:spcPts val="800"/>
-              </a:spcAft>
-              <a:defRPr sz="1600">
-                <a:solidFill>
-                  <a:srgbClr val="24324B"/>
-                </a:solidFill>
-                <a:latin typeface="Yu Gothic"/>
-              </a:defRPr>
-            </a:pPr>
-            <a:r>
-              <a:t>• 時系列入力とhidden state、ゲートを追う</a:t>
-            </a:r>
-          </a:p>
-          <a:p>
-            <a:pPr>
-              <a:spcAft>
-                <a:spcPts val="800"/>
-              </a:spcAft>
-              <a:defRPr sz="1600">
-                <a:solidFill>
-                  <a:srgbClr val="24324B"/>
-                </a:solidFill>
-                <a:latin typeface="Yu Gothic"/>
-              </a:defRPr>
-            </a:pPr>
+            <a:r>
+              <a:t>• LSTMの3ゲートで状態更新を追う</a:t>
+            </a:r>
+          </a:p>
+          <a:p>
             <a:r>
               <a:t>• Excel上の値や設定を変更する</a:t>
             </a:r>
           </a:p>
           <a:p>
-            <a:pPr>
-              <a:spcAft>
-                <a:spcPts val="800"/>
-              </a:spcAft>
-              <a:defRPr sz="1600">
-                <a:solidFill>
-                  <a:srgbClr val="24324B"/>
-                </a:solidFill>
-                <a:latin typeface="Yu Gothic"/>
-              </a:defRPr>
-            </a:pPr>
             <a:r>
               <a:t>• PythonがWorkbookから読み直して計算する</a:t>
             </a:r>
           </a:p>
           <a:p>
-            <a:pPr>
-              <a:spcAft>
-                <a:spcPts val="800"/>
-              </a:spcAft>
-              <a:defRPr sz="1600">
-                <a:solidFill>
-                  <a:srgbClr val="24324B"/>
-                </a:solidFill>
-                <a:latin typeface="Yu Gothic"/>
-              </a:defRPr>
-            </a:pPr>
             <a:r>
               <a:t>• 返却表の列を見て変化を確認する</a:t>
             </a:r>
@@ -8830,21 +8731,13 @@
           <a:bodyPr rtlCol="0" anchor="ctr" wrap="square" bIns="36576"/>
           <a:lstStyle/>
           <a:p>
-            <a:pPr algn="ctr">
-              <a:defRPr sz="1100" b="1">
-                <a:solidFill>
-                  <a:srgbClr val="2F6690"/>
-                </a:solidFill>
-                <a:latin typeface="Yu Gothic"/>
-              </a:defRPr>
-            </a:pPr>
             <a:r>
               <a:t>RNN / LSTMとは</a:t>
             </a:r>
             <a:br/>
             <a:br/>
             <a:r>
-              <a:t>RNNとは、過去の状態を次の時刻へ渡しながら系列を読むネットワークです。LSTMは残す情報と忘れる情報をゲートで調整します。</a:t>
+              <a:t>RNNとは、過去の状態を次の時刻へ渡しながら系列を読むネットワークです。LSTMはforget gate、input gate、output gateで、残す情報、入れる情報、外へ出す情報を調整します。</a:t>
             </a:r>
           </a:p>
         </p:txBody>
@@ -8890,21 +8783,13 @@
           <a:bodyPr rtlCol="0" anchor="ctr" wrap="square" bIns="36576"/>
           <a:lstStyle/>
           <a:p>
-            <a:pPr algn="ctr">
-              <a:defRPr sz="1500" b="1">
-                <a:solidFill>
-                  <a:srgbClr val="276749"/>
-                </a:solidFill>
-                <a:latin typeface="Yu Gothic"/>
-              </a:defRPr>
-            </a:pPr>
             <a:r>
               <a:t>見える変化</a:t>
             </a:r>
             <a:br/>
             <a:br/>
             <a:r>
-              <a:t>time_step / input</a:t>
+              <a:t>forget / input / output</a:t>
             </a:r>
             <a:br/>
             <a:r>
@@ -10081,20 +9966,12 @@
           <a:bodyPr rtlCol="0" anchor="ctr" wrap="square" bIns="36576"/>
           <a:lstStyle/>
           <a:p>
-            <a:pPr algn="ctr">
-              <a:defRPr sz="1700" b="1">
-                <a:solidFill>
-                  <a:srgbClr val="C77D20"/>
-                </a:solidFill>
-                <a:latin typeface="Yu Gothic"/>
-              </a:defRPr>
-            </a:pPr>
             <a:r>
               <a:t>gateで</a:t>
             </a:r>
             <a:br/>
             <a:r>
-              <a:t>残す/忘れる</a:t>
+              <a:t>残す/入れる/出す</a:t>
             </a:r>
           </a:p>
         </p:txBody>
@@ -10140,16 +10017,8 @@
           <a:bodyPr rtlCol="0" anchor="ctr" wrap="square" bIns="36576"/>
           <a:lstStyle/>
           <a:p>
-            <a:pPr algn="ctr">
-              <a:defRPr sz="1400" b="1">
-                <a:solidFill>
-                  <a:srgbClr val="276749"/>
-                </a:solidFill>
-                <a:latin typeface="Yu Gothic"/>
-              </a:defRPr>
-            </a:pPr>
-            <a:r>
-              <a:t>過去の情報を残すか忘れるかを表で追う</a:t>
+            <a:r>
+              <a:t>残す・入れる・出すを表で追う</a:t>
             </a:r>
           </a:p>
         </p:txBody>
@@ -11315,16 +11184,8 @@
           <a:bodyPr rtlCol="0" anchor="ctr" wrap="square" bIns="36576"/>
           <a:lstStyle/>
           <a:p>
-            <a:pPr algn="ctr">
-              <a:defRPr sz="1500" b="1">
-                <a:solidFill>
-                  <a:srgbClr val="24324B"/>
-                </a:solidFill>
-                <a:latin typeface="Yu Gothic"/>
-              </a:defRPr>
-            </a:pPr>
-            <a:r>
-              <a:t>Excelで変更した値が、そのままPythonの計算結果に反映されます。</a:t>
+            <a:r>
+              <a:t>入力値やゲートのパラメータを変えると、cell stateとhidden stateが変わります。</a:t>
             </a:r>
           </a:p>
         </p:txBody>
@@ -11449,16 +11310,8 @@
           </a:bodyPr>
           <a:lstStyle/>
           <a:p>
-            <a:pPr algn="l">
-              <a:defRPr sz="2500" b="1">
-                <a:solidFill>
-                  <a:srgbClr val="24324B"/>
-                </a:solidFill>
-                <a:latin typeface="Yu Gothic"/>
-              </a:defRPr>
-            </a:pPr>
-            <a:r>
-              <a:t>どこを変えると、どの表が変わるか</a:t>
+            <a:r>
+              <a:t>どこを変えると、どの状態が変わるか</a:t>
             </a:r>
           </a:p>
         </p:txBody>
@@ -11827,16 +11680,8 @@
           <a:bodyPr rtlCol="0" anchor="ctr" wrap="square" bIns="36576"/>
           <a:lstStyle/>
           <a:p>
-            <a:pPr algn="ctr">
-              <a:defRPr sz="1500" b="1">
-                <a:solidFill>
-                  <a:srgbClr val="276749"/>
-                </a:solidFill>
-                <a:latin typeface="Yu Gothic"/>
-              </a:defRPr>
-            </a:pPr>
-            <a:r>
-              <a:t>操作の目的は、値を変えた時の表の変化を読むことです。</a:t>
+            <a:r>
+              <a:t>forget、input、outputの各gateを見て、情報がどう残り、どう出るかを読みます。</a:t>
             </a:r>
           </a:p>
         </p:txBody>
@@ -13137,20 +12982,12 @@
           <a:bodyPr rtlCol="0" anchor="ctr" wrap="square" bIns="36576"/>
           <a:lstStyle/>
           <a:p>
-            <a:pPr algn="ctr">
-              <a:defRPr sz="1800" b="1">
-                <a:solidFill>
-                  <a:srgbClr val="276749"/>
-                </a:solidFill>
-                <a:latin typeface="Yu Gothic"/>
-              </a:defRPr>
-            </a:pPr>
-            <a:r>
-              <a:t>初期値の</a:t>
+            <a:r>
+              <a:t>gate_traceを</a:t>
             </a:r>
             <a:br/>
             <a:r>
-              <a:t>結果を読む</a:t>
+              <a:t>読む</a:t>
             </a:r>
           </a:p>
         </p:txBody>
